--- a/耶和華你是我的神(崇拜版).pptx
+++ b/耶和華你是我的神(崇拜版).pptx
@@ -165,10 +165,9 @@
           <a:lstStyle/>
           <a:p>
             <a:r>
-              <a:rPr lang="zh-TW" altLang="en-US" smtClean="0"/>
+              <a:rPr lang="zh-TW" altLang="en-US"/>
               <a:t>按一下以編輯母片標題樣式</a:t>
             </a:r>
-            <a:endParaRPr lang="zh-TW" altLang="en-US"/>
           </a:p>
         </p:txBody>
       </p:sp>
@@ -284,10 +283,9 @@
           </a:lstStyle>
           <a:p>
             <a:r>
-              <a:rPr lang="zh-TW" altLang="en-US" smtClean="0"/>
+              <a:rPr lang="zh-TW" altLang="en-US"/>
               <a:t>按一下以編輯母片副標題樣式</a:t>
             </a:r>
-            <a:endParaRPr lang="zh-TW" altLang="en-US"/>
           </a:p>
         </p:txBody>
       </p:sp>
@@ -308,7 +306,7 @@
           <a:p>
             <a:fld id="{EE4F3A96-FE46-4129-80E9-5BDFDB0321DA}" type="datetimeFigureOut">
               <a:rPr lang="zh-TW" altLang="en-US" smtClean="0"/>
-              <a:t>2023/5/6</a:t>
+              <a:t>2024/7/20</a:t>
             </a:fld>
             <a:endParaRPr lang="zh-TW" altLang="en-US"/>
           </a:p>
@@ -397,10 +395,9 @@
           <a:lstStyle/>
           <a:p>
             <a:r>
-              <a:rPr lang="zh-TW" altLang="en-US" smtClean="0"/>
+              <a:rPr lang="zh-TW" altLang="en-US"/>
               <a:t>按一下以編輯母片標題樣式</a:t>
             </a:r>
-            <a:endParaRPr lang="zh-TW" altLang="en-US"/>
           </a:p>
         </p:txBody>
       </p:sp>
@@ -421,38 +418,37 @@
           <a:p>
             <a:pPr lvl="0"/>
             <a:r>
-              <a:rPr lang="zh-TW" altLang="en-US" smtClean="0"/>
+              <a:rPr lang="zh-TW" altLang="en-US"/>
               <a:t>按一下以編輯母片文字樣式</a:t>
             </a:r>
           </a:p>
           <a:p>
             <a:pPr lvl="1"/>
             <a:r>
-              <a:rPr lang="zh-TW" altLang="en-US" smtClean="0"/>
+              <a:rPr lang="zh-TW" altLang="en-US"/>
               <a:t>第二層</a:t>
             </a:r>
           </a:p>
           <a:p>
             <a:pPr lvl="2"/>
             <a:r>
-              <a:rPr lang="zh-TW" altLang="en-US" smtClean="0"/>
+              <a:rPr lang="zh-TW" altLang="en-US"/>
               <a:t>第三層</a:t>
             </a:r>
           </a:p>
           <a:p>
             <a:pPr lvl="3"/>
             <a:r>
-              <a:rPr lang="zh-TW" altLang="en-US" smtClean="0"/>
+              <a:rPr lang="zh-TW" altLang="en-US"/>
               <a:t>第四層</a:t>
             </a:r>
           </a:p>
           <a:p>
             <a:pPr lvl="4"/>
             <a:r>
-              <a:rPr lang="zh-TW" altLang="en-US" smtClean="0"/>
+              <a:rPr lang="zh-TW" altLang="en-US"/>
               <a:t>第五層</a:t>
             </a:r>
-            <a:endParaRPr lang="zh-TW" altLang="en-US"/>
           </a:p>
         </p:txBody>
       </p:sp>
@@ -473,7 +469,7 @@
           <a:p>
             <a:fld id="{EE4F3A96-FE46-4129-80E9-5BDFDB0321DA}" type="datetimeFigureOut">
               <a:rPr lang="zh-TW" altLang="en-US" smtClean="0"/>
-              <a:t>2023/5/6</a:t>
+              <a:t>2024/7/20</a:t>
             </a:fld>
             <a:endParaRPr lang="zh-TW" altLang="en-US"/>
           </a:p>
@@ -567,10 +563,9 @@
           <a:lstStyle/>
           <a:p>
             <a:r>
-              <a:rPr lang="zh-TW" altLang="en-US" smtClean="0"/>
+              <a:rPr lang="zh-TW" altLang="en-US"/>
               <a:t>按一下以編輯母片標題樣式</a:t>
             </a:r>
-            <a:endParaRPr lang="zh-TW" altLang="en-US"/>
           </a:p>
         </p:txBody>
       </p:sp>
@@ -596,38 +591,37 @@
           <a:p>
             <a:pPr lvl="0"/>
             <a:r>
-              <a:rPr lang="zh-TW" altLang="en-US" smtClean="0"/>
+              <a:rPr lang="zh-TW" altLang="en-US"/>
               <a:t>按一下以編輯母片文字樣式</a:t>
             </a:r>
           </a:p>
           <a:p>
             <a:pPr lvl="1"/>
             <a:r>
-              <a:rPr lang="zh-TW" altLang="en-US" smtClean="0"/>
+              <a:rPr lang="zh-TW" altLang="en-US"/>
               <a:t>第二層</a:t>
             </a:r>
           </a:p>
           <a:p>
             <a:pPr lvl="2"/>
             <a:r>
-              <a:rPr lang="zh-TW" altLang="en-US" smtClean="0"/>
+              <a:rPr lang="zh-TW" altLang="en-US"/>
               <a:t>第三層</a:t>
             </a:r>
           </a:p>
           <a:p>
             <a:pPr lvl="3"/>
             <a:r>
-              <a:rPr lang="zh-TW" altLang="en-US" smtClean="0"/>
+              <a:rPr lang="zh-TW" altLang="en-US"/>
               <a:t>第四層</a:t>
             </a:r>
           </a:p>
           <a:p>
             <a:pPr lvl="4"/>
             <a:r>
-              <a:rPr lang="zh-TW" altLang="en-US" smtClean="0"/>
+              <a:rPr lang="zh-TW" altLang="en-US"/>
               <a:t>第五層</a:t>
             </a:r>
-            <a:endParaRPr lang="zh-TW" altLang="en-US"/>
           </a:p>
         </p:txBody>
       </p:sp>
@@ -648,7 +642,7 @@
           <a:p>
             <a:fld id="{EE4F3A96-FE46-4129-80E9-5BDFDB0321DA}" type="datetimeFigureOut">
               <a:rPr lang="zh-TW" altLang="en-US" smtClean="0"/>
-              <a:t>2023/5/6</a:t>
+              <a:t>2024/7/20</a:t>
             </a:fld>
             <a:endParaRPr lang="zh-TW" altLang="en-US"/>
           </a:p>
@@ -737,10 +731,9 @@
           <a:lstStyle/>
           <a:p>
             <a:r>
-              <a:rPr lang="zh-TW" altLang="en-US" smtClean="0"/>
+              <a:rPr lang="zh-TW" altLang="en-US"/>
               <a:t>按一下以編輯母片標題樣式</a:t>
             </a:r>
-            <a:endParaRPr lang="zh-TW" altLang="en-US"/>
           </a:p>
         </p:txBody>
       </p:sp>
@@ -761,38 +754,37 @@
           <a:p>
             <a:pPr lvl="0"/>
             <a:r>
-              <a:rPr lang="zh-TW" altLang="en-US" smtClean="0"/>
+              <a:rPr lang="zh-TW" altLang="en-US"/>
               <a:t>按一下以編輯母片文字樣式</a:t>
             </a:r>
           </a:p>
           <a:p>
             <a:pPr lvl="1"/>
             <a:r>
-              <a:rPr lang="zh-TW" altLang="en-US" smtClean="0"/>
+              <a:rPr lang="zh-TW" altLang="en-US"/>
               <a:t>第二層</a:t>
             </a:r>
           </a:p>
           <a:p>
             <a:pPr lvl="2"/>
             <a:r>
-              <a:rPr lang="zh-TW" altLang="en-US" smtClean="0"/>
+              <a:rPr lang="zh-TW" altLang="en-US"/>
               <a:t>第三層</a:t>
             </a:r>
           </a:p>
           <a:p>
             <a:pPr lvl="3"/>
             <a:r>
-              <a:rPr lang="zh-TW" altLang="en-US" smtClean="0"/>
+              <a:rPr lang="zh-TW" altLang="en-US"/>
               <a:t>第四層</a:t>
             </a:r>
           </a:p>
           <a:p>
             <a:pPr lvl="4"/>
             <a:r>
-              <a:rPr lang="zh-TW" altLang="en-US" smtClean="0"/>
+              <a:rPr lang="zh-TW" altLang="en-US"/>
               <a:t>第五層</a:t>
             </a:r>
-            <a:endParaRPr lang="zh-TW" altLang="en-US"/>
           </a:p>
         </p:txBody>
       </p:sp>
@@ -813,7 +805,7 @@
           <a:p>
             <a:fld id="{EE4F3A96-FE46-4129-80E9-5BDFDB0321DA}" type="datetimeFigureOut">
               <a:rPr lang="zh-TW" altLang="en-US" smtClean="0"/>
-              <a:t>2023/5/6</a:t>
+              <a:t>2024/7/20</a:t>
             </a:fld>
             <a:endParaRPr lang="zh-TW" altLang="en-US"/>
           </a:p>
@@ -911,10 +903,9 @@
           </a:lstStyle>
           <a:p>
             <a:r>
-              <a:rPr lang="zh-TW" altLang="en-US" smtClean="0"/>
+              <a:rPr lang="zh-TW" altLang="en-US"/>
               <a:t>按一下以編輯母片標題樣式</a:t>
             </a:r>
-            <a:endParaRPr lang="zh-TW" altLang="en-US"/>
           </a:p>
         </p:txBody>
       </p:sp>
@@ -1031,7 +1022,7 @@
           <a:p>
             <a:pPr lvl="0"/>
             <a:r>
-              <a:rPr lang="zh-TW" altLang="en-US" smtClean="0"/>
+              <a:rPr lang="zh-TW" altLang="en-US"/>
               <a:t>按一下以編輯母片文字樣式</a:t>
             </a:r>
           </a:p>
@@ -1054,7 +1045,7 @@
           <a:p>
             <a:fld id="{EE4F3A96-FE46-4129-80E9-5BDFDB0321DA}" type="datetimeFigureOut">
               <a:rPr lang="zh-TW" altLang="en-US" smtClean="0"/>
-              <a:t>2023/5/6</a:t>
+              <a:t>2024/7/20</a:t>
             </a:fld>
             <a:endParaRPr lang="zh-TW" altLang="en-US"/>
           </a:p>
@@ -1143,10 +1134,9 @@
           <a:lstStyle/>
           <a:p>
             <a:r>
-              <a:rPr lang="zh-TW" altLang="en-US" smtClean="0"/>
+              <a:rPr lang="zh-TW" altLang="en-US"/>
               <a:t>按一下以編輯母片標題樣式</a:t>
             </a:r>
-            <a:endParaRPr lang="zh-TW" altLang="en-US"/>
           </a:p>
         </p:txBody>
       </p:sp>
@@ -1200,38 +1190,37 @@
           <a:p>
             <a:pPr lvl="0"/>
             <a:r>
-              <a:rPr lang="zh-TW" altLang="en-US" smtClean="0"/>
+              <a:rPr lang="zh-TW" altLang="en-US"/>
               <a:t>按一下以編輯母片文字樣式</a:t>
             </a:r>
           </a:p>
           <a:p>
             <a:pPr lvl="1"/>
             <a:r>
-              <a:rPr lang="zh-TW" altLang="en-US" smtClean="0"/>
+              <a:rPr lang="zh-TW" altLang="en-US"/>
               <a:t>第二層</a:t>
             </a:r>
           </a:p>
           <a:p>
             <a:pPr lvl="2"/>
             <a:r>
-              <a:rPr lang="zh-TW" altLang="en-US" smtClean="0"/>
+              <a:rPr lang="zh-TW" altLang="en-US"/>
               <a:t>第三層</a:t>
             </a:r>
           </a:p>
           <a:p>
             <a:pPr lvl="3"/>
             <a:r>
-              <a:rPr lang="zh-TW" altLang="en-US" smtClean="0"/>
+              <a:rPr lang="zh-TW" altLang="en-US"/>
               <a:t>第四層</a:t>
             </a:r>
           </a:p>
           <a:p>
             <a:pPr lvl="4"/>
             <a:r>
-              <a:rPr lang="zh-TW" altLang="en-US" smtClean="0"/>
+              <a:rPr lang="zh-TW" altLang="en-US"/>
               <a:t>第五層</a:t>
             </a:r>
-            <a:endParaRPr lang="zh-TW" altLang="en-US"/>
           </a:p>
         </p:txBody>
       </p:sp>
@@ -1285,38 +1274,37 @@
           <a:p>
             <a:pPr lvl="0"/>
             <a:r>
-              <a:rPr lang="zh-TW" altLang="en-US" smtClean="0"/>
+              <a:rPr lang="zh-TW" altLang="en-US"/>
               <a:t>按一下以編輯母片文字樣式</a:t>
             </a:r>
           </a:p>
           <a:p>
             <a:pPr lvl="1"/>
             <a:r>
-              <a:rPr lang="zh-TW" altLang="en-US" smtClean="0"/>
+              <a:rPr lang="zh-TW" altLang="en-US"/>
               <a:t>第二層</a:t>
             </a:r>
           </a:p>
           <a:p>
             <a:pPr lvl="2"/>
             <a:r>
-              <a:rPr lang="zh-TW" altLang="en-US" smtClean="0"/>
+              <a:rPr lang="zh-TW" altLang="en-US"/>
               <a:t>第三層</a:t>
             </a:r>
           </a:p>
           <a:p>
             <a:pPr lvl="3"/>
             <a:r>
-              <a:rPr lang="zh-TW" altLang="en-US" smtClean="0"/>
+              <a:rPr lang="zh-TW" altLang="en-US"/>
               <a:t>第四層</a:t>
             </a:r>
           </a:p>
           <a:p>
             <a:pPr lvl="4"/>
             <a:r>
-              <a:rPr lang="zh-TW" altLang="en-US" smtClean="0"/>
+              <a:rPr lang="zh-TW" altLang="en-US"/>
               <a:t>第五層</a:t>
             </a:r>
-            <a:endParaRPr lang="zh-TW" altLang="en-US"/>
           </a:p>
         </p:txBody>
       </p:sp>
@@ -1337,7 +1325,7 @@
           <a:p>
             <a:fld id="{EE4F3A96-FE46-4129-80E9-5BDFDB0321DA}" type="datetimeFigureOut">
               <a:rPr lang="zh-TW" altLang="en-US" smtClean="0"/>
-              <a:t>2023/5/6</a:t>
+              <a:t>2024/7/20</a:t>
             </a:fld>
             <a:endParaRPr lang="zh-TW" altLang="en-US"/>
           </a:p>
@@ -1430,10 +1418,9 @@
           </a:lstStyle>
           <a:p>
             <a:r>
-              <a:rPr lang="zh-TW" altLang="en-US" smtClean="0"/>
+              <a:rPr lang="zh-TW" altLang="en-US"/>
               <a:t>按一下以編輯母片標題樣式</a:t>
             </a:r>
-            <a:endParaRPr lang="zh-TW" altLang="en-US"/>
           </a:p>
         </p:txBody>
       </p:sp>
@@ -1496,7 +1483,7 @@
           <a:p>
             <a:pPr lvl="0"/>
             <a:r>
-              <a:rPr lang="zh-TW" altLang="en-US" smtClean="0"/>
+              <a:rPr lang="zh-TW" altLang="en-US"/>
               <a:t>按一下以編輯母片文字樣式</a:t>
             </a:r>
           </a:p>
@@ -1552,38 +1539,37 @@
           <a:p>
             <a:pPr lvl="0"/>
             <a:r>
-              <a:rPr lang="zh-TW" altLang="en-US" smtClean="0"/>
+              <a:rPr lang="zh-TW" altLang="en-US"/>
               <a:t>按一下以編輯母片文字樣式</a:t>
             </a:r>
           </a:p>
           <a:p>
             <a:pPr lvl="1"/>
             <a:r>
-              <a:rPr lang="zh-TW" altLang="en-US" smtClean="0"/>
+              <a:rPr lang="zh-TW" altLang="en-US"/>
               <a:t>第二層</a:t>
             </a:r>
           </a:p>
           <a:p>
             <a:pPr lvl="2"/>
             <a:r>
-              <a:rPr lang="zh-TW" altLang="en-US" smtClean="0"/>
+              <a:rPr lang="zh-TW" altLang="en-US"/>
               <a:t>第三層</a:t>
             </a:r>
           </a:p>
           <a:p>
             <a:pPr lvl="3"/>
             <a:r>
-              <a:rPr lang="zh-TW" altLang="en-US" smtClean="0"/>
+              <a:rPr lang="zh-TW" altLang="en-US"/>
               <a:t>第四層</a:t>
             </a:r>
           </a:p>
           <a:p>
             <a:pPr lvl="4"/>
             <a:r>
-              <a:rPr lang="zh-TW" altLang="en-US" smtClean="0"/>
+              <a:rPr lang="zh-TW" altLang="en-US"/>
               <a:t>第五層</a:t>
             </a:r>
-            <a:endParaRPr lang="zh-TW" altLang="en-US"/>
           </a:p>
         </p:txBody>
       </p:sp>
@@ -1646,7 +1632,7 @@
           <a:p>
             <a:pPr lvl="0"/>
             <a:r>
-              <a:rPr lang="zh-TW" altLang="en-US" smtClean="0"/>
+              <a:rPr lang="zh-TW" altLang="en-US"/>
               <a:t>按一下以編輯母片文字樣式</a:t>
             </a:r>
           </a:p>
@@ -1702,38 +1688,37 @@
           <a:p>
             <a:pPr lvl="0"/>
             <a:r>
-              <a:rPr lang="zh-TW" altLang="en-US" smtClean="0"/>
+              <a:rPr lang="zh-TW" altLang="en-US"/>
               <a:t>按一下以編輯母片文字樣式</a:t>
             </a:r>
           </a:p>
           <a:p>
             <a:pPr lvl="1"/>
             <a:r>
-              <a:rPr lang="zh-TW" altLang="en-US" smtClean="0"/>
+              <a:rPr lang="zh-TW" altLang="en-US"/>
               <a:t>第二層</a:t>
             </a:r>
           </a:p>
           <a:p>
             <a:pPr lvl="2"/>
             <a:r>
-              <a:rPr lang="zh-TW" altLang="en-US" smtClean="0"/>
+              <a:rPr lang="zh-TW" altLang="en-US"/>
               <a:t>第三層</a:t>
             </a:r>
           </a:p>
           <a:p>
             <a:pPr lvl="3"/>
             <a:r>
-              <a:rPr lang="zh-TW" altLang="en-US" smtClean="0"/>
+              <a:rPr lang="zh-TW" altLang="en-US"/>
               <a:t>第四層</a:t>
             </a:r>
           </a:p>
           <a:p>
             <a:pPr lvl="4"/>
             <a:r>
-              <a:rPr lang="zh-TW" altLang="en-US" smtClean="0"/>
+              <a:rPr lang="zh-TW" altLang="en-US"/>
               <a:t>第五層</a:t>
             </a:r>
-            <a:endParaRPr lang="zh-TW" altLang="en-US"/>
           </a:p>
         </p:txBody>
       </p:sp>
@@ -1754,7 +1739,7 @@
           <a:p>
             <a:fld id="{EE4F3A96-FE46-4129-80E9-5BDFDB0321DA}" type="datetimeFigureOut">
               <a:rPr lang="zh-TW" altLang="en-US" smtClean="0"/>
-              <a:t>2023/5/6</a:t>
+              <a:t>2024/7/20</a:t>
             </a:fld>
             <a:endParaRPr lang="zh-TW" altLang="en-US"/>
           </a:p>
@@ -1843,10 +1828,9 @@
           <a:lstStyle/>
           <a:p>
             <a:r>
-              <a:rPr lang="zh-TW" altLang="en-US" smtClean="0"/>
+              <a:rPr lang="zh-TW" altLang="en-US"/>
               <a:t>按一下以編輯母片標題樣式</a:t>
             </a:r>
-            <a:endParaRPr lang="zh-TW" altLang="en-US"/>
           </a:p>
         </p:txBody>
       </p:sp>
@@ -1867,7 +1851,7 @@
           <a:p>
             <a:fld id="{EE4F3A96-FE46-4129-80E9-5BDFDB0321DA}" type="datetimeFigureOut">
               <a:rPr lang="zh-TW" altLang="en-US" smtClean="0"/>
-              <a:t>2023/5/6</a:t>
+              <a:t>2024/7/20</a:t>
             </a:fld>
             <a:endParaRPr lang="zh-TW" altLang="en-US"/>
           </a:p>
@@ -1957,7 +1941,7 @@
           <a:p>
             <a:fld id="{EE4F3A96-FE46-4129-80E9-5BDFDB0321DA}" type="datetimeFigureOut">
               <a:rPr lang="zh-TW" altLang="en-US" smtClean="0"/>
-              <a:t>2023/5/6</a:t>
+              <a:t>2024/7/20</a:t>
             </a:fld>
             <a:endParaRPr lang="zh-TW" altLang="en-US"/>
           </a:p>
@@ -2055,10 +2039,9 @@
           </a:lstStyle>
           <a:p>
             <a:r>
-              <a:rPr lang="zh-TW" altLang="en-US" smtClean="0"/>
+              <a:rPr lang="zh-TW" altLang="en-US"/>
               <a:t>按一下以編輯母片標題樣式</a:t>
             </a:r>
-            <a:endParaRPr lang="zh-TW" altLang="en-US"/>
           </a:p>
         </p:txBody>
       </p:sp>
@@ -2112,38 +2095,37 @@
           <a:p>
             <a:pPr lvl="0"/>
             <a:r>
-              <a:rPr lang="zh-TW" altLang="en-US" smtClean="0"/>
+              <a:rPr lang="zh-TW" altLang="en-US"/>
               <a:t>按一下以編輯母片文字樣式</a:t>
             </a:r>
           </a:p>
           <a:p>
             <a:pPr lvl="1"/>
             <a:r>
-              <a:rPr lang="zh-TW" altLang="en-US" smtClean="0"/>
+              <a:rPr lang="zh-TW" altLang="en-US"/>
               <a:t>第二層</a:t>
             </a:r>
           </a:p>
           <a:p>
             <a:pPr lvl="2"/>
             <a:r>
-              <a:rPr lang="zh-TW" altLang="en-US" smtClean="0"/>
+              <a:rPr lang="zh-TW" altLang="en-US"/>
               <a:t>第三層</a:t>
             </a:r>
           </a:p>
           <a:p>
             <a:pPr lvl="3"/>
             <a:r>
-              <a:rPr lang="zh-TW" altLang="en-US" smtClean="0"/>
+              <a:rPr lang="zh-TW" altLang="en-US"/>
               <a:t>第四層</a:t>
             </a:r>
           </a:p>
           <a:p>
             <a:pPr lvl="4"/>
             <a:r>
-              <a:rPr lang="zh-TW" altLang="en-US" smtClean="0"/>
+              <a:rPr lang="zh-TW" altLang="en-US"/>
               <a:t>第五層</a:t>
             </a:r>
-            <a:endParaRPr lang="zh-TW" altLang="en-US"/>
           </a:p>
         </p:txBody>
       </p:sp>
@@ -2206,7 +2188,7 @@
           <a:p>
             <a:pPr lvl="0"/>
             <a:r>
-              <a:rPr lang="zh-TW" altLang="en-US" smtClean="0"/>
+              <a:rPr lang="zh-TW" altLang="en-US"/>
               <a:t>按一下以編輯母片文字樣式</a:t>
             </a:r>
           </a:p>
@@ -2229,7 +2211,7 @@
           <a:p>
             <a:fld id="{EE4F3A96-FE46-4129-80E9-5BDFDB0321DA}" type="datetimeFigureOut">
               <a:rPr lang="zh-TW" altLang="en-US" smtClean="0"/>
-              <a:t>2023/5/6</a:t>
+              <a:t>2024/7/20</a:t>
             </a:fld>
             <a:endParaRPr lang="zh-TW" altLang="en-US"/>
           </a:p>
@@ -2327,10 +2309,9 @@
           </a:lstStyle>
           <a:p>
             <a:r>
-              <a:rPr lang="zh-TW" altLang="en-US" smtClean="0"/>
+              <a:rPr lang="zh-TW" altLang="en-US"/>
               <a:t>按一下以編輯母片標題樣式</a:t>
             </a:r>
-            <a:endParaRPr lang="zh-TW" altLang="en-US"/>
           </a:p>
         </p:txBody>
       </p:sp>
@@ -2392,10 +2373,9 @@
           </a:lstStyle>
           <a:p>
             <a:r>
-              <a:rPr lang="zh-TW" altLang="en-US" smtClean="0"/>
+              <a:rPr lang="zh-TW" altLang="en-US"/>
               <a:t>按一下圖示以新增圖片</a:t>
             </a:r>
-            <a:endParaRPr lang="zh-TW" altLang="en-US"/>
           </a:p>
         </p:txBody>
       </p:sp>
@@ -2458,7 +2438,7 @@
           <a:p>
             <a:pPr lvl="0"/>
             <a:r>
-              <a:rPr lang="zh-TW" altLang="en-US" smtClean="0"/>
+              <a:rPr lang="zh-TW" altLang="en-US"/>
               <a:t>按一下以編輯母片文字樣式</a:t>
             </a:r>
           </a:p>
@@ -2481,7 +2461,7 @@
           <a:p>
             <a:fld id="{EE4F3A96-FE46-4129-80E9-5BDFDB0321DA}" type="datetimeFigureOut">
               <a:rPr lang="zh-TW" altLang="en-US" smtClean="0"/>
-              <a:t>2023/5/6</a:t>
+              <a:t>2024/7/20</a:t>
             </a:fld>
             <a:endParaRPr lang="zh-TW" altLang="en-US"/>
           </a:p>
@@ -2590,10 +2570,9 @@
           <a:lstStyle/>
           <a:p>
             <a:r>
-              <a:rPr lang="zh-TW" altLang="en-US" smtClean="0"/>
+              <a:rPr lang="zh-TW" altLang="en-US"/>
               <a:t>按一下以編輯母片標題樣式</a:t>
             </a:r>
-            <a:endParaRPr lang="zh-TW" altLang="en-US"/>
           </a:p>
         </p:txBody>
       </p:sp>
@@ -2624,38 +2603,37 @@
           <a:p>
             <a:pPr lvl="0"/>
             <a:r>
-              <a:rPr lang="zh-TW" altLang="en-US" smtClean="0"/>
+              <a:rPr lang="zh-TW" altLang="en-US"/>
               <a:t>按一下以編輯母片文字樣式</a:t>
             </a:r>
           </a:p>
           <a:p>
             <a:pPr lvl="1"/>
             <a:r>
-              <a:rPr lang="zh-TW" altLang="en-US" smtClean="0"/>
+              <a:rPr lang="zh-TW" altLang="en-US"/>
               <a:t>第二層</a:t>
             </a:r>
           </a:p>
           <a:p>
             <a:pPr lvl="2"/>
             <a:r>
-              <a:rPr lang="zh-TW" altLang="en-US" smtClean="0"/>
+              <a:rPr lang="zh-TW" altLang="en-US"/>
               <a:t>第三層</a:t>
             </a:r>
           </a:p>
           <a:p>
             <a:pPr lvl="3"/>
             <a:r>
-              <a:rPr lang="zh-TW" altLang="en-US" smtClean="0"/>
+              <a:rPr lang="zh-TW" altLang="en-US"/>
               <a:t>第四層</a:t>
             </a:r>
           </a:p>
           <a:p>
             <a:pPr lvl="4"/>
             <a:r>
-              <a:rPr lang="zh-TW" altLang="en-US" smtClean="0"/>
+              <a:rPr lang="zh-TW" altLang="en-US"/>
               <a:t>第五層</a:t>
             </a:r>
-            <a:endParaRPr lang="zh-TW" altLang="en-US"/>
           </a:p>
         </p:txBody>
       </p:sp>
@@ -2694,7 +2672,7 @@
           <a:p>
             <a:fld id="{EE4F3A96-FE46-4129-80E9-5BDFDB0321DA}" type="datetimeFigureOut">
               <a:rPr lang="zh-TW" altLang="en-US" smtClean="0"/>
-              <a:t>2023/5/6</a:t>
+              <a:t>2024/7/20</a:t>
             </a:fld>
             <a:endParaRPr lang="zh-TW" altLang="en-US"/>
           </a:p>
@@ -3101,24 +3079,7 @@
                 <a:latin typeface="微軟正黑體" pitchFamily="34" charset="-120"/>
                 <a:ea typeface="微軟正黑體" pitchFamily="34" charset="-120"/>
               </a:rPr>
-              <a:t>耶和</a:t>
-            </a:r>
-            <a:r>
-              <a:rPr lang="zh-TW" altLang="en-US" sz="7200" b="1" i="1" dirty="0" smtClean="0">
-                <a:solidFill>
-                  <a:srgbClr val="660033"/>
-                </a:solidFill>
-                <a:effectLst>
-                  <a:outerShdw blurRad="38100" dist="38100" dir="2700000" algn="tl">
-                    <a:srgbClr val="000000">
-                      <a:alpha val="43137"/>
-                    </a:srgbClr>
-                  </a:outerShdw>
-                </a:effectLst>
-                <a:latin typeface="微軟正黑體" pitchFamily="34" charset="-120"/>
-                <a:ea typeface="微軟正黑體" pitchFamily="34" charset="-120"/>
-              </a:rPr>
-              <a:t>華</a:t>
+              <a:t>耶和華</a:t>
             </a:r>
             <a:r>
               <a:rPr lang="zh-CN" altLang="en-US" sz="7200" b="1" i="1" dirty="0">
@@ -3138,7 +3099,7 @@
               <a:t>祢</a:t>
             </a:r>
             <a:r>
-              <a:rPr lang="zh-TW" altLang="en-US" sz="7200" b="1" i="1" dirty="0" smtClean="0">
+              <a:rPr lang="zh-TW" altLang="en-US" sz="7200" b="1" i="1" dirty="0">
                 <a:solidFill>
                   <a:srgbClr val="660033"/>
                 </a:solidFill>
@@ -3152,24 +3113,7 @@
                 <a:latin typeface="微軟正黑體" pitchFamily="34" charset="-120"/>
                 <a:ea typeface="微軟正黑體" pitchFamily="34" charset="-120"/>
               </a:rPr>
-              <a:t>是</a:t>
-            </a:r>
-            <a:r>
-              <a:rPr lang="zh-TW" altLang="en-US" sz="7200" b="1" i="1" dirty="0">
-                <a:solidFill>
-                  <a:srgbClr val="660033"/>
-                </a:solidFill>
-                <a:effectLst>
-                  <a:outerShdw blurRad="38100" dist="38100" dir="2700000" algn="tl">
-                    <a:srgbClr val="000000">
-                      <a:alpha val="43137"/>
-                    </a:srgbClr>
-                  </a:outerShdw>
-                </a:effectLst>
-                <a:latin typeface="微軟正黑體" pitchFamily="34" charset="-120"/>
-                <a:ea typeface="微軟正黑體" pitchFamily="34" charset="-120"/>
-              </a:rPr>
-              <a:t>我的神</a:t>
+              <a:t>是我的神</a:t>
             </a:r>
           </a:p>
         </p:txBody>
@@ -3237,17 +3181,7 @@
                 <a:latin typeface="微軟正黑體" pitchFamily="34" charset="-120"/>
                 <a:ea typeface="微軟正黑體" pitchFamily="34" charset="-120"/>
               </a:rPr>
-              <a:t>耶和</a:t>
-            </a:r>
-            <a:r>
-              <a:rPr lang="zh-TW" altLang="en-US" sz="6400" b="1" dirty="0">
-                <a:solidFill>
-                  <a:srgbClr val="660033"/>
-                </a:solidFill>
-                <a:latin typeface="微軟正黑體" pitchFamily="34" charset="-120"/>
-                <a:ea typeface="微軟正黑體" pitchFamily="34" charset="-120"/>
-              </a:rPr>
-              <a:t>華</a:t>
+              <a:t>耶和華</a:t>
             </a:r>
             <a:r>
               <a:rPr lang="zh-CN" altLang="en-US" sz="6400" b="1" dirty="0">
@@ -3267,17 +3201,7 @@
                 <a:latin typeface="微軟正黑體" pitchFamily="34" charset="-120"/>
                 <a:ea typeface="微軟正黑體" pitchFamily="34" charset="-120"/>
               </a:rPr>
-              <a:t>是</a:t>
-            </a:r>
-            <a:r>
-              <a:rPr lang="zh-TW" altLang="en-US" sz="6400" b="1" dirty="0">
-                <a:solidFill>
-                  <a:srgbClr val="660033"/>
-                </a:solidFill>
-                <a:latin typeface="微軟正黑體" pitchFamily="34" charset="-120"/>
-                <a:ea typeface="微軟正黑體" pitchFamily="34" charset="-120"/>
-              </a:rPr>
-              <a:t>我的神</a:t>
+              <a:t>是我的神</a:t>
             </a:r>
             <a:endParaRPr lang="en-US" altLang="zh-TW" sz="6400" b="1" dirty="0">
               <a:solidFill>
@@ -3299,17 +3223,7 @@
                 <a:latin typeface="微軟正黑體" pitchFamily="34" charset="-120"/>
                 <a:ea typeface="微軟正黑體" pitchFamily="34" charset="-120"/>
               </a:rPr>
-              <a:t>我要時時稱</a:t>
-            </a:r>
-            <a:r>
-              <a:rPr lang="zh-TW" altLang="en-US" sz="6400" b="1" dirty="0" smtClean="0">
-                <a:solidFill>
-                  <a:srgbClr val="660033"/>
-                </a:solidFill>
-                <a:latin typeface="微軟正黑體" pitchFamily="34" charset="-120"/>
-                <a:ea typeface="微軟正黑體" pitchFamily="34" charset="-120"/>
-              </a:rPr>
-              <a:t>頌</a:t>
+              <a:t>我要時時稱頌</a:t>
             </a:r>
             <a:r>
               <a:rPr lang="zh-CN" altLang="en-US" sz="6400" b="1" dirty="0">
@@ -3322,24 +3236,14 @@
               <a:t>祢</a:t>
             </a:r>
             <a:r>
-              <a:rPr lang="zh-TW" altLang="en-US" sz="6400" b="1" dirty="0" smtClean="0">
+              <a:rPr lang="zh-TW" altLang="en-US" sz="6400" b="1" dirty="0">
                 <a:solidFill>
                   <a:srgbClr val="660033"/>
                 </a:solidFill>
                 <a:latin typeface="微軟正黑體" pitchFamily="34" charset="-120"/>
                 <a:ea typeface="微軟正黑體" pitchFamily="34" charset="-120"/>
               </a:rPr>
-              <a:t>的</a:t>
-            </a:r>
-            <a:r>
-              <a:rPr lang="zh-TW" altLang="en-US" sz="6400" b="1" dirty="0">
-                <a:solidFill>
-                  <a:srgbClr val="660033"/>
-                </a:solidFill>
-                <a:latin typeface="微軟正黑體" pitchFamily="34" charset="-120"/>
-                <a:ea typeface="微軟正黑體" pitchFamily="34" charset="-120"/>
-              </a:rPr>
-              <a:t>名</a:t>
+              <a:t>的名</a:t>
             </a:r>
             <a:endParaRPr lang="en-US" altLang="zh-TW" sz="6400" b="1" dirty="0">
               <a:solidFill>
@@ -3375,7 +3279,7 @@
           <a:p>
             <a:pPr algn="ctr"/>
             <a:r>
-              <a:rPr lang="en-US" sz="4000" b="1" dirty="0" smtClean="0">
+              <a:rPr lang="en-US" sz="4000" b="1" dirty="0">
                 <a:solidFill>
                   <a:srgbClr val="660033"/>
                 </a:solidFill>
@@ -3385,17 +3289,17 @@
               <a:t>( </a:t>
             </a:r>
             <a:r>
-              <a:rPr lang="zh-CN" altLang="en-US" sz="4000" b="1" dirty="0" smtClean="0">
+              <a:rPr lang="zh-CN" altLang="en-US" sz="4000" b="1" dirty="0">
                 <a:solidFill>
                   <a:srgbClr val="660033"/>
                 </a:solidFill>
                 <a:latin typeface="Microsoft JhengHei" panose="020B0604030504040204" pitchFamily="34" charset="-120"/>
                 <a:ea typeface="Microsoft JhengHei" panose="020B0604030504040204" pitchFamily="34" charset="-120"/>
               </a:rPr>
-              <a:t>正</a:t>
-            </a:r>
-            <a:r>
-              <a:rPr lang="en-US" sz="4000" b="1" dirty="0" smtClean="0">
+              <a:t>正歌</a:t>
+            </a:r>
+            <a:r>
+              <a:rPr lang="en-US" sz="4000" b="1" dirty="0">
                 <a:solidFill>
                   <a:srgbClr val="660033"/>
                 </a:solidFill>
@@ -3479,24 +3383,14 @@
               <a:t>祢</a:t>
             </a:r>
             <a:r>
-              <a:rPr lang="zh-TW" altLang="en-US" sz="6400" b="1" dirty="0" smtClean="0">
+              <a:rPr lang="zh-TW" altLang="en-US" sz="6400" b="1" dirty="0">
                 <a:solidFill>
                   <a:srgbClr val="660033"/>
                 </a:solidFill>
                 <a:latin typeface="微軟正黑體" pitchFamily="34" charset="-120"/>
                 <a:ea typeface="微軟正黑體" pitchFamily="34" charset="-120"/>
               </a:rPr>
-              <a:t>是</a:t>
-            </a:r>
-            <a:r>
-              <a:rPr lang="zh-TW" altLang="en-US" sz="6400" b="1" dirty="0">
-                <a:solidFill>
-                  <a:srgbClr val="660033"/>
-                </a:solidFill>
-                <a:latin typeface="微軟正黑體" pitchFamily="34" charset="-120"/>
-                <a:ea typeface="微軟正黑體" pitchFamily="34" charset="-120"/>
-              </a:rPr>
-              <a:t>我的盾牌  是我的榮耀</a:t>
+              <a:t>是我的盾牌  是我的榮耀</a:t>
             </a:r>
             <a:endParaRPr lang="en-US" altLang="zh-TW" sz="6400" b="1" dirty="0">
               <a:solidFill>
@@ -3547,7 +3441,7 @@
           <a:p>
             <a:pPr algn="ctr"/>
             <a:r>
-              <a:rPr lang="en-US" sz="4000" b="1" dirty="0" smtClean="0">
+              <a:rPr lang="en-US" sz="4000" b="1" dirty="0">
                 <a:solidFill>
                   <a:srgbClr val="660033"/>
                 </a:solidFill>
@@ -3557,17 +3451,17 @@
               <a:t>( </a:t>
             </a:r>
             <a:r>
-              <a:rPr lang="zh-CN" altLang="en-US" sz="4000" b="1" dirty="0" smtClean="0">
+              <a:rPr lang="zh-CN" altLang="en-US" sz="4000" b="1" dirty="0">
                 <a:solidFill>
                   <a:srgbClr val="660033"/>
                 </a:solidFill>
                 <a:latin typeface="Microsoft JhengHei" panose="020B0604030504040204" pitchFamily="34" charset="-120"/>
                 <a:ea typeface="Microsoft JhengHei" panose="020B0604030504040204" pitchFamily="34" charset="-120"/>
               </a:rPr>
-              <a:t>正</a:t>
-            </a:r>
-            <a:r>
-              <a:rPr lang="en-US" sz="4000" b="1" dirty="0" smtClean="0">
+              <a:t>正歌</a:t>
+            </a:r>
+            <a:r>
+              <a:rPr lang="en-US" sz="4000" b="1" dirty="0">
                 <a:solidFill>
                   <a:srgbClr val="660033"/>
                 </a:solidFill>
@@ -3663,7 +3557,7 @@
               <a:buNone/>
             </a:pPr>
             <a:r>
-              <a:rPr lang="zh-TW" altLang="en-US" sz="6400" b="1" dirty="0" smtClean="0">
+              <a:rPr lang="zh-TW" altLang="en-US" sz="6400" b="1" dirty="0">
                 <a:solidFill>
                   <a:srgbClr val="660033"/>
                 </a:solidFill>
@@ -3683,24 +3577,14 @@
               <a:t>祢</a:t>
             </a:r>
             <a:r>
-              <a:rPr lang="zh-TW" altLang="en-US" sz="6400" b="1" dirty="0" smtClean="0">
+              <a:rPr lang="zh-TW" altLang="en-US" sz="6400" b="1" dirty="0">
                 <a:solidFill>
                   <a:srgbClr val="660033"/>
                 </a:solidFill>
                 <a:latin typeface="微軟正黑體" pitchFamily="34" charset="-120"/>
                 <a:ea typeface="微軟正黑體" pitchFamily="34" charset="-120"/>
               </a:rPr>
-              <a:t>懷</a:t>
-            </a:r>
-            <a:r>
-              <a:rPr lang="zh-TW" altLang="en-US" sz="6400" b="1" dirty="0">
-                <a:solidFill>
-                  <a:srgbClr val="660033"/>
-                </a:solidFill>
-                <a:latin typeface="微軟正黑體" pitchFamily="34" charset="-120"/>
-                <a:ea typeface="微軟正黑體" pitchFamily="34" charset="-120"/>
-              </a:rPr>
-              <a:t>中必不怕遭害</a:t>
+              <a:t>懷中必不怕遭害</a:t>
             </a:r>
             <a:endParaRPr lang="en-US" altLang="zh-TW" sz="6400" b="1" dirty="0">
               <a:solidFill>
@@ -3736,7 +3620,7 @@
           <a:p>
             <a:pPr algn="ctr"/>
             <a:r>
-              <a:rPr lang="en-US" sz="4000" b="1" dirty="0" smtClean="0">
+              <a:rPr lang="en-US" sz="4000" b="1" dirty="0">
                 <a:solidFill>
                   <a:srgbClr val="660033"/>
                 </a:solidFill>
@@ -3746,17 +3630,17 @@
               <a:t>( </a:t>
             </a:r>
             <a:r>
-              <a:rPr lang="zh-CN" altLang="en-US" sz="4000" b="1" dirty="0" smtClean="0">
+              <a:rPr lang="zh-CN" altLang="en-US" sz="4000" b="1" dirty="0">
                 <a:solidFill>
                   <a:srgbClr val="660033"/>
                 </a:solidFill>
                 <a:latin typeface="Microsoft JhengHei" panose="020B0604030504040204" pitchFamily="34" charset="-120"/>
                 <a:ea typeface="Microsoft JhengHei" panose="020B0604030504040204" pitchFamily="34" charset="-120"/>
               </a:rPr>
-              <a:t>副</a:t>
-            </a:r>
-            <a:r>
-              <a:rPr lang="en-US" sz="4000" b="1" dirty="0" smtClean="0">
+              <a:t>副歌</a:t>
+            </a:r>
+            <a:r>
+              <a:rPr lang="en-US" sz="4000" b="1" dirty="0">
                 <a:solidFill>
                   <a:srgbClr val="660033"/>
                 </a:solidFill>
@@ -3840,24 +3724,14 @@
               <a:t>祢</a:t>
             </a:r>
             <a:r>
-              <a:rPr lang="zh-TW" altLang="en-US" sz="6400" b="1" dirty="0" smtClean="0">
+              <a:rPr lang="zh-TW" altLang="en-US" sz="6400" b="1" dirty="0">
                 <a:solidFill>
                   <a:srgbClr val="660033"/>
                 </a:solidFill>
                 <a:latin typeface="微軟正黑體" pitchFamily="34" charset="-120"/>
                 <a:ea typeface="微軟正黑體" pitchFamily="34" charset="-120"/>
               </a:rPr>
-              <a:t>是</a:t>
-            </a:r>
-            <a:r>
-              <a:rPr lang="zh-TW" altLang="en-US" sz="6400" b="1" dirty="0">
-                <a:solidFill>
-                  <a:srgbClr val="660033"/>
-                </a:solidFill>
-                <a:latin typeface="微軟正黑體" pitchFamily="34" charset="-120"/>
-                <a:ea typeface="微軟正黑體" pitchFamily="34" charset="-120"/>
-              </a:rPr>
-              <a:t>我的神  我所倚靠的</a:t>
+              <a:t>是我的神  我所倚靠的</a:t>
             </a:r>
             <a:endParaRPr lang="en-US" altLang="zh-TW" sz="6400" b="1" dirty="0">
               <a:solidFill>
@@ -3882,24 +3756,14 @@
               <a:t>祢</a:t>
             </a:r>
             <a:r>
-              <a:rPr lang="zh-TW" altLang="en-US" sz="6400" b="1" dirty="0" smtClean="0">
+              <a:rPr lang="zh-TW" altLang="en-US" sz="6400" b="1" dirty="0">
                 <a:solidFill>
                   <a:srgbClr val="660033"/>
                 </a:solidFill>
                 <a:latin typeface="微軟正黑體" pitchFamily="34" charset="-120"/>
                 <a:ea typeface="微軟正黑體" pitchFamily="34" charset="-120"/>
               </a:rPr>
-              <a:t>同</a:t>
-            </a:r>
-            <a:r>
-              <a:rPr lang="zh-TW" altLang="en-US" sz="6400" b="1" dirty="0">
-                <a:solidFill>
-                  <a:srgbClr val="660033"/>
-                </a:solidFill>
-                <a:latin typeface="微軟正黑體" pitchFamily="34" charset="-120"/>
-                <a:ea typeface="微軟正黑體" pitchFamily="34" charset="-120"/>
-              </a:rPr>
-              <a:t>在使我全然得勝</a:t>
+              <a:t>同在使我全然得勝</a:t>
             </a:r>
           </a:p>
         </p:txBody>
@@ -3928,7 +3792,7 @@
           <a:p>
             <a:pPr algn="ctr"/>
             <a:r>
-              <a:rPr lang="en-US" sz="4000" b="1" dirty="0" smtClean="0">
+              <a:rPr lang="en-US" sz="4000" b="1" dirty="0">
                 <a:solidFill>
                   <a:srgbClr val="660033"/>
                 </a:solidFill>
@@ -3938,17 +3802,17 @@
               <a:t>( </a:t>
             </a:r>
             <a:r>
-              <a:rPr lang="zh-CN" altLang="en-US" sz="4000" b="1" dirty="0" smtClean="0">
+              <a:rPr lang="zh-CN" altLang="en-US" sz="4000" b="1" dirty="0">
                 <a:solidFill>
                   <a:srgbClr val="660033"/>
                 </a:solidFill>
                 <a:latin typeface="Microsoft JhengHei" panose="020B0604030504040204" pitchFamily="34" charset="-120"/>
                 <a:ea typeface="Microsoft JhengHei" panose="020B0604030504040204" pitchFamily="34" charset="-120"/>
               </a:rPr>
-              <a:t>副</a:t>
-            </a:r>
-            <a:r>
-              <a:rPr lang="en-US" sz="4000" b="1" dirty="0" smtClean="0">
+              <a:t>副歌</a:t>
+            </a:r>
+            <a:r>
+              <a:rPr lang="en-US" sz="4000" b="1">
                 <a:solidFill>
                   <a:srgbClr val="660033"/>
                 </a:solidFill>
